--- a/dist/초6/국어/토론과글쓰기/초6_국어_토론과글쓰기_02_논설문쓰기.pptx
+++ b/dist/초6/국어/토론과글쓰기/초6_국어_토론과글쓰기_02_논설문쓰기.pptx
@@ -121,13 +121,13 @@
   <p:extLst>
     <p:ext uri="{521415D9-36F7-43E2-AB2F-B90AF26B5E84}">
       <p14:sectionLst xmlns:p14="http://schemas.microsoft.com/office/powerpoint/2010/main">
-        <p14:section name="도입" id="{74570337-4328-a766-e7c6-7d8228b82cea}">
+        <p14:section name="도입" id="{aa7d3ac9-823c-8417-cfbf-d0d9d8220f01}">
           <p14:sldIdLst>
             <p14:sldId id="256"/>
             <p14:sldId id="257"/>
           </p14:sldIdLst>
         </p14:section>
-        <p14:section name="개념" id="{c45f1eb8-fea7-354a-439e-ce1fe57ce437}">
+        <p14:section name="개념" id="{fcd67825-220a-9442-fb08-8d5a395bb52d}">
           <p14:sldIdLst>
             <p14:sldId id="258"/>
             <p14:sldId id="259"/>
@@ -136,26 +136,26 @@
             <p14:sldId id="262"/>
           </p14:sldIdLst>
         </p14:section>
-        <p14:section name="연습" id="{0fea3952-8f62-5c10-5973-a8bf843a86eb}">
+        <p14:section name="연습" id="{3bb3a803-feff-1148-64aa-a6ce9eefa1c3}">
           <p14:sldIdLst>
             <p14:sldId id="263"/>
             <p14:sldId id="264"/>
             <p14:sldId id="265"/>
           </p14:sldIdLst>
         </p14:section>
-        <p14:section name="확인" id="{2d1b69c4-8739-3b92-c813-b29801acf620}">
+        <p14:section name="확인" id="{76bed151-450e-53fa-bccb-6eb287a4c6f6}">
           <p14:sldIdLst>
             <p14:sldId id="266"/>
             <p14:sldId id="267"/>
             <p14:sldId id="268"/>
           </p14:sldIdLst>
         </p14:section>
-        <p14:section name="정리" id="{88fb2e4a-3057-cef0-b169-4ca8dbe3a7d1}">
+        <p14:section name="정리" id="{7de8165f-1d2d-5c9f-c730-6dfd6dce3cd0}">
           <p14:sldIdLst>
             <p14:sldId id="269"/>
           </p14:sldIdLst>
         </p14:section>
-        <p14:section name="보충" id="{2cc94a26-28ed-1685-cb82-882d6ea04fde}">
+        <p14:section name="보충" id="{09a10d56-eae2-4267-d2ab-3bd9e2fd1b8d}">
           <p14:sldIdLst>
             <p14:sldId id="270"/>
           </p14:sldIdLst>
@@ -8115,7 +8115,7 @@
           </p:nvPr>
         </p:nvGraphicFramePr>
         <p:xfrm>
-          <a:off x="836676" y="1490980"/>
+          <a:off x="836676" y="1420876"/>
           <a:ext cx="10515600" cy="914400"/>
         </p:xfrm>
         <a:graphic>
@@ -8126,7 +8126,7 @@
                 <a:gridCol w="2944368"/>
                 <a:gridCol w="7571232"/>
               </a:tblGrid>
-              <a:tr h="433070">
+              <a:tr h="450596">
                 <a:tc>
                   <a:txBody>
                     <a:bodyPr/>
@@ -8264,7 +8264,7 @@
                   </a:tcPr>
                 </a:tc>
               </a:tr>
-              <a:tr h="433070">
+              <a:tr h="450596">
                 <a:tc>
                   <a:txBody>
                     <a:bodyPr/>
@@ -8402,7 +8402,7 @@
                   </a:tcPr>
                 </a:tc>
               </a:tr>
-              <a:tr h="433070">
+              <a:tr h="450596">
                 <a:tc>
                   <a:txBody>
                     <a:bodyPr/>
@@ -8540,7 +8540,7 @@
                   </a:tcPr>
                 </a:tc>
               </a:tr>
-              <a:tr h="433070">
+              <a:tr h="450596">
                 <a:tc>
                   <a:txBody>
                     <a:bodyPr/>
@@ -8678,7 +8678,7 @@
                   </a:tcPr>
                 </a:tc>
               </a:tr>
-              <a:tr h="433070">
+              <a:tr h="450596">
                 <a:tc>
                   <a:txBody>
                     <a:bodyPr/>
@@ -8816,7 +8816,7 @@
                   </a:tcPr>
                 </a:tc>
               </a:tr>
-              <a:tr h="433070">
+              <a:tr h="450596">
                 <a:tc>
                   <a:txBody>
                     <a:bodyPr/>
@@ -8954,7 +8954,7 @@
                   </a:tcPr>
                 </a:tc>
               </a:tr>
-              <a:tr h="433070">
+              <a:tr h="450596">
                 <a:tc>
                   <a:txBody>
                     <a:bodyPr/>
@@ -9092,7 +9092,7 @@
                   </a:tcPr>
                 </a:tc>
               </a:tr>
-              <a:tr h="433070">
+              <a:tr h="450596">
                 <a:tc>
                   <a:txBody>
                     <a:bodyPr/>
